--- a/scratch/test_presentation.pptx
+++ b/scratch/test_presentation.pptx
@@ -3442,7 +3442,7 @@
                 <a:latin typeface="Calibri"/>
                 <a:cs typeface="Calibri"/>
               </a:rPr>
-              <a:t>ناساندنی سیمینار و تێزی سەرەکی</a:t>
+              <a:t>زیرەکی دەستکرد</a:t>
             </a:r>
           </a:p>
           <a:p>

--- a/scratch/test_presentation.pptx
+++ b/scratch/test_presentation.pptx
@@ -5085,6 +5085,23 @@
               <a:t>• سەرچاوە: Goodfellow, I. (2023). Deep Learning. MIT Press.</a:t>
             </a:r>
           </a:p>
+          <a:p>
+            <a:pPr algn="ctr" rtl="1">
+              <a:spcBef>
+                <a:spcPts val="1200"/>
+              </a:spcBef>
+            </a:pPr>
+            <a:r>
+              <a:rPr lang="ar-IQ" sz="2000" b="1">
+                <a:solidFill>
+                  <a:srgbClr val="2563EB"/>
+                </a:solidFill>
+                <a:latin typeface="Calibri"/>
+                <a:cs typeface="Calibri"/>
+              </a:rPr>
+              <a:t>✨ سوپاس بۆ ئامادەبوونتان ✨</a:t>
+            </a:r>
+          </a:p>
         </p:txBody>
       </p:sp>
       <p:sp>

--- a/scratch/test_presentation.pptx
+++ b/scratch/test_presentation.pptx
@@ -3312,7 +3312,7 @@
 </file>
 
 <file path=ppt/slides/slide1.xml><?xml version="1.0" encoding="utf-8"?>
-<p:sld xmlns:a="http://schemas.openxmlformats.org/drawingml/2006/main" xmlns:r="http://schemas.openxmlformats.org/officeDocument/2006/relationships" xmlns:p="http://schemas.openxmlformats.org/presentationml/2006/main">
+<p:sld xmlns:a="http://schemas.openxmlformats.org/drawingml/2006/main" xmlns:r="http://schemas.openxmlformats.org/officeDocument/2006/relationships" xmlns:p="http://schemas.openxmlformats.org/presentationml/2006/main" xmlns:mc="http://schemas.openxmlformats.org/markup-compatibility/2006" xmlns:p14="http://schemas.microsoft.com/office/powerpoint/2010/main" mc:Ignorable="p14">
   <p:cSld>
     <p:spTree>
       <p:nvGrpSpPr>
@@ -3371,18 +3371,47 @@
           </a:solidFill>
         </p:spPr>
       </p:sp>
-      <p:sp>
-        <p:nvSpPr>
-          <p:cNvPr id="4" name="UnivBadge"/>
+      <p:pic>
+        <p:nvPicPr>
+          <p:cNvPr id="4" name="HeroImage"/>
+          <p:cNvPicPr>
+            <a:picLocks noChangeAspect="1"/>
+          </p:cNvPicPr>
+          <p:nvPr/>
+        </p:nvPicPr>
+        <p:blipFill>
+          <a:blip r:embed="rId2"/>
+          <a:stretch>
+            <a:fillRect/>
+          </a:stretch>
+        </p:blipFill>
+        <p:spPr>
+          <a:xfrm>
+            <a:off x="700000" y="700000"/>
+            <a:ext cx="4600000" cy="5458000"/>
+          </a:xfrm>
+          <a:prstGeom prst="roundRect">
+            <a:avLst/>
+          </a:prstGeom>
+          <a:ln w="25400">
+            <a:solidFill>
+              <a:srgbClr val="2563EB"/>
+            </a:solidFill>
+          </a:ln>
+        </p:spPr>
+      </p:pic>
+      <p:sp>
+        <p:nvSpPr>
+          <p:cNvPr id="5" name="UnivBadge"/>
           <p:cNvSpPr/>
           <p:nvPr/>
         </p:nvSpPr>
         <p:spPr>
           <a:xfrm>
-            <a:off x="3100000" y="800000"/>
-            <a:ext cx="5992000" cy="450000"/>
-          </a:xfrm>
-          <a:prstGeom prst="rect">
+            <a:off x="5600000" y="700000"/>
+            <a:ext cx="5892000" cy="500000"/>
+          </a:xfrm>
+          <a:prstGeom prst="roundRect">
             <a:avLst/>
           </a:prstGeom>
           <a:solidFill>
@@ -3414,7 +3443,7 @@
       </p:sp>
       <p:sp>
         <p:nvSpPr>
-          <p:cNvPr id="6" name="Title"/>
+          <p:cNvPr id="7" name="Title"/>
           <p:cNvSpPr>
             <a:spLocks noGrp="1"/>
           </p:cNvSpPr>
@@ -3422,8 +3451,8 @@
         </p:nvSpPr>
         <p:spPr>
           <a:xfrm>
-            <a:off x="900000" y="1500000"/>
-            <a:ext cx="10392000" cy="2200000"/>
+            <a:off x="5600000" y="1400000"/>
+            <a:ext cx="5892000" cy="2400000"/>
           </a:xfrm>
           <a:prstGeom prst="rect">
             <a:avLst/>
@@ -3433,9 +3462,9 @@
           <a:bodyPr anchor="ctr" rtlCol="1"/>
           <a:lstStyle/>
           <a:p>
-            <a:pPr algn="ctr" rtl="1"/>
-            <a:r>
-              <a:rPr lang="ar-IQ" sz="3400" b="1">
+            <a:pPr algn="r" rtl="1"/>
+            <a:r>
+              <a:rPr lang="ar-IQ" sz="3000" b="1">
                 <a:solidFill>
                   <a:srgbClr val="FFFFFF"/>
                 </a:solidFill>
@@ -3446,13 +3475,13 @@
             </a:r>
           </a:p>
           <a:p>
-            <a:pPr algn="ctr" rtl="1">
+            <a:pPr algn="r" rtl="1">
               <a:spcBef>
-                <a:spcPts val="1200"/>
+                <a:spcPts val="1000"/>
               </a:spcBef>
             </a:pPr>
             <a:r>
-              <a:rPr lang="ar-IQ" sz="1500">
+              <a:rPr lang="ar-IQ" sz="1400">
                 <a:solidFill>
                   <a:srgbClr val="94A3B8"/>
                 </a:solidFill>
@@ -3466,16 +3495,16 @@
       </p:sp>
       <p:sp>
         <p:nvSpPr>
-          <p:cNvPr id="7" name="StudentCard"/>
+          <p:cNvPr id="8" name="StudentCard"/>
           <p:cNvSpPr/>
           <p:nvPr/>
         </p:nvSpPr>
         <p:spPr>
           <a:xfrm>
-            <a:off x="1000000" y="4200000"/>
-            <a:ext cx="4900000" cy="1800000"/>
-          </a:xfrm>
-          <a:prstGeom prst="rect">
+            <a:off x="5600000" y="4050000"/>
+            <a:ext cx="5892000" cy="980000"/>
+          </a:xfrm>
+          <a:prstGeom prst="roundRect">
             <a:avLst/>
           </a:prstGeom>
           <a:solidFill>
@@ -3488,29 +3517,22 @@
           </a:ln>
         </p:spPr>
         <p:txBody>
-          <a:bodyPr anchor="ctr" rtlCol="1" lIns="200000" tIns="160000" rIns="200000" bIns="160000"/>
-          <a:lstStyle/>
-          <a:p>
-            <a:pPr algn="ctr" rtl="1"/>
-            <a:r>
-              <a:rPr lang="ar-IQ" sz="1300" b="1">
+          <a:bodyPr anchor="ctr" rtlCol="1" lIns="160000" tIns="120000" rIns="160000" bIns="120000"/>
+          <a:lstStyle/>
+          <a:p>
+            <a:pPr algn="r" rtl="1"/>
+            <a:r>
+              <a:rPr lang="ar-IQ" sz="1200" b="1">
                 <a:solidFill>
                   <a:srgbClr val="38BDF8"/>
                 </a:solidFill>
                 <a:latin typeface="Calibri"/>
                 <a:cs typeface="Calibri"/>
               </a:rPr>
-              <a:t>ئامادەکردنی:</a:t>
-            </a:r>
-          </a:p>
-          <a:p>
-            <a:pPr algn="ctr" rtl="1">
-              <a:spcBef>
-                <a:spcPts val="800"/>
-              </a:spcBef>
-            </a:pPr>
-            <a:r>
-              <a:rPr lang="ar-IQ" sz="1800" b="1">
+              <a:t>ئامادەکردنی: </a:t>
+            </a:r>
+            <a:r>
+              <a:rPr lang="ar-IQ" sz="1600" b="1">
                 <a:solidFill>
                   <a:srgbClr val="FFFFFF"/>
                 </a:solidFill>
@@ -3524,16 +3546,16 @@
       </p:sp>
       <p:sp>
         <p:nvSpPr>
-          <p:cNvPr id="8" name="SupervisorCard"/>
+          <p:cNvPr id="9" name="SupervisorCard"/>
           <p:cNvSpPr/>
           <p:nvPr/>
         </p:nvSpPr>
         <p:spPr>
           <a:xfrm>
-            <a:off x="6292000" y="4200000"/>
-            <a:ext cx="4900000" cy="1800000"/>
-          </a:xfrm>
-          <a:prstGeom prst="rect">
+            <a:off x="5600000" y="5150000"/>
+            <a:ext cx="5892000" cy="980000"/>
+          </a:xfrm>
+          <a:prstGeom prst="roundRect">
             <a:avLst/>
           </a:prstGeom>
           <a:solidFill>
@@ -3546,29 +3568,22 @@
           </a:ln>
         </p:spPr>
         <p:txBody>
-          <a:bodyPr anchor="ctr" rtlCol="1" lIns="200000" tIns="160000" rIns="200000" bIns="160000"/>
-          <a:lstStyle/>
-          <a:p>
-            <a:pPr algn="ctr" rtl="1"/>
-            <a:r>
-              <a:rPr lang="ar-IQ" sz="1300" b="1">
+          <a:bodyPr anchor="ctr" rtlCol="1" lIns="160000" tIns="120000" rIns="160000" bIns="120000"/>
+          <a:lstStyle/>
+          <a:p>
+            <a:pPr algn="r" rtl="1"/>
+            <a:r>
+              <a:rPr lang="ar-IQ" sz="1200" b="1">
                 <a:solidFill>
                   <a:srgbClr val="34D399"/>
                 </a:solidFill>
                 <a:latin typeface="Calibri"/>
                 <a:cs typeface="Calibri"/>
               </a:rPr>
-              <a:t>مامۆستای سەرپەرشتیار:</a:t>
-            </a:r>
-          </a:p>
-          <a:p>
-            <a:pPr algn="ctr" rtl="1">
-              <a:spcBef>
-                <a:spcPts val="800"/>
-              </a:spcBef>
-            </a:pPr>
-            <a:r>
-              <a:rPr lang="ar-IQ" sz="1800" b="1">
+              <a:t>مامۆستای سەرپەرشتیار: </a:t>
+            </a:r>
+            <a:r>
+              <a:rPr lang="ar-IQ" sz="1600" b="1">
                 <a:solidFill>
                   <a:srgbClr val="FFFFFF"/>
                 </a:solidFill>
@@ -3585,11 +3600,21 @@
   <p:clrMapOvr>
     <a:masterClrMapping/>
   </p:clrMapOvr>
+  <p:transition spd="med" advClick="1">
+    <mc:AlternateContent>
+      <mc:Choice Requires="p14">
+        <p14:morph/>
+      </mc:Choice>
+      <mc:Fallback>
+        <p:fade/>
+      </mc:Fallback>
+    </mc:AlternateContent>
+  </p:transition>
 </p:sld>
 </file>
 
 <file path=ppt/slides/slide2.xml><?xml version="1.0" encoding="utf-8"?>
-<p:sld xmlns:a="http://schemas.openxmlformats.org/drawingml/2006/main" xmlns:r="http://schemas.openxmlformats.org/officeDocument/2006/relationships" xmlns:p="http://schemas.openxmlformats.org/presentationml/2006/main">
+<p:sld xmlns:a="http://schemas.openxmlformats.org/drawingml/2006/main" xmlns:r="http://schemas.openxmlformats.org/officeDocument/2006/relationships" xmlns:p="http://schemas.openxmlformats.org/presentationml/2006/main" xmlns:mc="http://schemas.openxmlformats.org/markup-compatibility/2006" xmlns:p14="http://schemas.microsoft.com/office/powerpoint/2010/main" mc:Ignorable="p14">
   <p:cSld>
     <p:spTree>
       <p:nvGrpSpPr>
@@ -3678,12 +3703,12 @@
             <a:off x="600000" y="1300000"/>
             <a:ext cx="4600000" cy="4900000"/>
           </a:xfrm>
-          <a:prstGeom prst="rect">
+          <a:prstGeom prst="roundRect">
             <a:avLst/>
           </a:prstGeom>
           <a:ln w="19050">
             <a:solidFill>
-              <a:srgbClr val="CBD5E1"/>
+              <a:srgbClr val="2563EB"/>
             </a:solidFill>
           </a:ln>
         </p:spPr>
@@ -3699,7 +3724,7 @@
             <a:off x="5400000" y="1300000"/>
             <a:ext cx="6192000" cy="4900000"/>
           </a:xfrm>
-          <a:prstGeom prst="rect">
+          <a:prstGeom prst="roundRect">
             <a:avLst/>
           </a:prstGeom>
           <a:solidFill>
@@ -3805,11 +3830,21 @@
   <p:clrMapOvr>
     <a:masterClrMapping/>
   </p:clrMapOvr>
+  <p:transition spd="med" advClick="1">
+    <mc:AlternateContent>
+      <mc:Choice Requires="p14">
+        <p14:morph/>
+      </mc:Choice>
+      <mc:Fallback>
+        <p:fade/>
+      </mc:Fallback>
+    </mc:AlternateContent>
+  </p:transition>
 </p:sld>
 </file>
 
 <file path=ppt/slides/slide3.xml><?xml version="1.0" encoding="utf-8"?>
-<p:sld xmlns:a="http://schemas.openxmlformats.org/drawingml/2006/main" xmlns:r="http://schemas.openxmlformats.org/officeDocument/2006/relationships" xmlns:p="http://schemas.openxmlformats.org/presentationml/2006/main">
+<p:sld xmlns:a="http://schemas.openxmlformats.org/drawingml/2006/main" xmlns:r="http://schemas.openxmlformats.org/officeDocument/2006/relationships" xmlns:p="http://schemas.openxmlformats.org/presentationml/2006/main" xmlns:mc="http://schemas.openxmlformats.org/markup-compatibility/2006" xmlns:p14="http://schemas.microsoft.com/office/powerpoint/2010/main" mc:Ignorable="p14">
   <p:cSld>
     <p:spTree>
       <p:nvGrpSpPr>
@@ -3898,12 +3933,12 @@
             <a:off x="600000" y="1300000"/>
             <a:ext cx="4600000" cy="4900000"/>
           </a:xfrm>
-          <a:prstGeom prst="rect">
+          <a:prstGeom prst="roundRect">
             <a:avLst/>
           </a:prstGeom>
           <a:ln w="19050">
             <a:solidFill>
-              <a:srgbClr val="CBD5E1"/>
+              <a:srgbClr val="2563EB"/>
             </a:solidFill>
           </a:ln>
         </p:spPr>
@@ -3919,7 +3954,7 @@
             <a:off x="5400000" y="1300000"/>
             <a:ext cx="6192000" cy="4900000"/>
           </a:xfrm>
-          <a:prstGeom prst="rect">
+          <a:prstGeom prst="roundRect">
             <a:avLst/>
           </a:prstGeom>
           <a:solidFill>
@@ -4025,11 +4060,21 @@
   <p:clrMapOvr>
     <a:masterClrMapping/>
   </p:clrMapOvr>
+  <p:transition spd="med" advClick="1">
+    <mc:AlternateContent>
+      <mc:Choice Requires="p14">
+        <p14:morph/>
+      </mc:Choice>
+      <mc:Fallback>
+        <p:fade/>
+      </mc:Fallback>
+    </mc:AlternateContent>
+  </p:transition>
 </p:sld>
 </file>
 
 <file path=ppt/slides/slide4.xml><?xml version="1.0" encoding="utf-8"?>
-<p:sld xmlns:a="http://schemas.openxmlformats.org/drawingml/2006/main" xmlns:r="http://schemas.openxmlformats.org/officeDocument/2006/relationships" xmlns:p="http://schemas.openxmlformats.org/presentationml/2006/main">
+<p:sld xmlns:a="http://schemas.openxmlformats.org/drawingml/2006/main" xmlns:r="http://schemas.openxmlformats.org/officeDocument/2006/relationships" xmlns:p="http://schemas.openxmlformats.org/presentationml/2006/main" xmlns:mc="http://schemas.openxmlformats.org/markup-compatibility/2006" xmlns:p14="http://schemas.microsoft.com/office/powerpoint/2010/main" mc:Ignorable="p14">
   <p:cSld>
     <p:spTree>
       <p:nvGrpSpPr>
@@ -4118,12 +4163,12 @@
             <a:off x="600000" y="1300000"/>
             <a:ext cx="4600000" cy="4900000"/>
           </a:xfrm>
-          <a:prstGeom prst="rect">
+          <a:prstGeom prst="roundRect">
             <a:avLst/>
           </a:prstGeom>
           <a:ln w="19050">
             <a:solidFill>
-              <a:srgbClr val="CBD5E1"/>
+              <a:srgbClr val="2563EB"/>
             </a:solidFill>
           </a:ln>
         </p:spPr>
@@ -4139,7 +4184,7 @@
             <a:off x="5400000" y="1300000"/>
             <a:ext cx="6192000" cy="4900000"/>
           </a:xfrm>
-          <a:prstGeom prst="rect">
+          <a:prstGeom prst="roundRect">
             <a:avLst/>
           </a:prstGeom>
           <a:solidFill>
@@ -4245,11 +4290,21 @@
   <p:clrMapOvr>
     <a:masterClrMapping/>
   </p:clrMapOvr>
+  <p:transition spd="med" advClick="1">
+    <mc:AlternateContent>
+      <mc:Choice Requires="p14">
+        <p14:morph/>
+      </mc:Choice>
+      <mc:Fallback>
+        <p:fade/>
+      </mc:Fallback>
+    </mc:AlternateContent>
+  </p:transition>
 </p:sld>
 </file>
 
 <file path=ppt/slides/slide5.xml><?xml version="1.0" encoding="utf-8"?>
-<p:sld xmlns:a="http://schemas.openxmlformats.org/drawingml/2006/main" xmlns:r="http://schemas.openxmlformats.org/officeDocument/2006/relationships" xmlns:p="http://schemas.openxmlformats.org/presentationml/2006/main">
+<p:sld xmlns:a="http://schemas.openxmlformats.org/drawingml/2006/main" xmlns:r="http://schemas.openxmlformats.org/officeDocument/2006/relationships" xmlns:p="http://schemas.openxmlformats.org/presentationml/2006/main" xmlns:mc="http://schemas.openxmlformats.org/markup-compatibility/2006" xmlns:p14="http://schemas.microsoft.com/office/powerpoint/2010/main" mc:Ignorable="p14">
   <p:cSld>
     <p:spTree>
       <p:nvGrpSpPr>
@@ -4338,12 +4393,12 @@
             <a:off x="600000" y="1300000"/>
             <a:ext cx="4600000" cy="4900000"/>
           </a:xfrm>
-          <a:prstGeom prst="rect">
+          <a:prstGeom prst="roundRect">
             <a:avLst/>
           </a:prstGeom>
           <a:ln w="19050">
             <a:solidFill>
-              <a:srgbClr val="CBD5E1"/>
+              <a:srgbClr val="2563EB"/>
             </a:solidFill>
           </a:ln>
         </p:spPr>
@@ -4359,7 +4414,7 @@
             <a:off x="5400000" y="1300000"/>
             <a:ext cx="6192000" cy="4900000"/>
           </a:xfrm>
-          <a:prstGeom prst="rect">
+          <a:prstGeom prst="roundRect">
             <a:avLst/>
           </a:prstGeom>
           <a:solidFill>
@@ -4465,11 +4520,21 @@
   <p:clrMapOvr>
     <a:masterClrMapping/>
   </p:clrMapOvr>
+  <p:transition spd="med" advClick="1">
+    <mc:AlternateContent>
+      <mc:Choice Requires="p14">
+        <p14:morph/>
+      </mc:Choice>
+      <mc:Fallback>
+        <p:fade/>
+      </mc:Fallback>
+    </mc:AlternateContent>
+  </p:transition>
 </p:sld>
 </file>
 
 <file path=ppt/slides/slide6.xml><?xml version="1.0" encoding="utf-8"?>
-<p:sld xmlns:a="http://schemas.openxmlformats.org/drawingml/2006/main" xmlns:r="http://schemas.openxmlformats.org/officeDocument/2006/relationships" xmlns:p="http://schemas.openxmlformats.org/presentationml/2006/main">
+<p:sld xmlns:a="http://schemas.openxmlformats.org/drawingml/2006/main" xmlns:r="http://schemas.openxmlformats.org/officeDocument/2006/relationships" xmlns:p="http://schemas.openxmlformats.org/presentationml/2006/main" xmlns:mc="http://schemas.openxmlformats.org/markup-compatibility/2006" xmlns:p14="http://schemas.microsoft.com/office/powerpoint/2010/main" mc:Ignorable="p14">
   <p:cSld>
     <p:spTree>
       <p:nvGrpSpPr>
@@ -4558,12 +4623,12 @@
             <a:off x="600000" y="1300000"/>
             <a:ext cx="4600000" cy="4900000"/>
           </a:xfrm>
-          <a:prstGeom prst="rect">
+          <a:prstGeom prst="roundRect">
             <a:avLst/>
           </a:prstGeom>
           <a:ln w="19050">
             <a:solidFill>
-              <a:srgbClr val="CBD5E1"/>
+              <a:srgbClr val="2563EB"/>
             </a:solidFill>
           </a:ln>
         </p:spPr>
@@ -4579,7 +4644,7 @@
             <a:off x="5400000" y="1300000"/>
             <a:ext cx="6192000" cy="4900000"/>
           </a:xfrm>
-          <a:prstGeom prst="rect">
+          <a:prstGeom prst="roundRect">
             <a:avLst/>
           </a:prstGeom>
           <a:solidFill>
@@ -4685,11 +4750,21 @@
   <p:clrMapOvr>
     <a:masterClrMapping/>
   </p:clrMapOvr>
+  <p:transition spd="med" advClick="1">
+    <mc:AlternateContent>
+      <mc:Choice Requires="p14">
+        <p14:morph/>
+      </mc:Choice>
+      <mc:Fallback>
+        <p:fade/>
+      </mc:Fallback>
+    </mc:AlternateContent>
+  </p:transition>
 </p:sld>
 </file>
 
 <file path=ppt/slides/slide7.xml><?xml version="1.0" encoding="utf-8"?>
-<p:sld xmlns:a="http://schemas.openxmlformats.org/drawingml/2006/main" xmlns:r="http://schemas.openxmlformats.org/officeDocument/2006/relationships" xmlns:p="http://schemas.openxmlformats.org/presentationml/2006/main">
+<p:sld xmlns:a="http://schemas.openxmlformats.org/drawingml/2006/main" xmlns:r="http://schemas.openxmlformats.org/officeDocument/2006/relationships" xmlns:p="http://schemas.openxmlformats.org/presentationml/2006/main" xmlns:mc="http://schemas.openxmlformats.org/markup-compatibility/2006" xmlns:p14="http://schemas.microsoft.com/office/powerpoint/2010/main" mc:Ignorable="p14">
   <p:cSld>
     <p:spTree>
       <p:nvGrpSpPr>
@@ -4778,12 +4853,12 @@
             <a:off x="600000" y="1300000"/>
             <a:ext cx="4600000" cy="4900000"/>
           </a:xfrm>
-          <a:prstGeom prst="rect">
+          <a:prstGeom prst="roundRect">
             <a:avLst/>
           </a:prstGeom>
           <a:ln w="19050">
             <a:solidFill>
-              <a:srgbClr val="CBD5E1"/>
+              <a:srgbClr val="2563EB"/>
             </a:solidFill>
           </a:ln>
         </p:spPr>
@@ -4799,7 +4874,7 @@
             <a:off x="5400000" y="1300000"/>
             <a:ext cx="6192000" cy="4900000"/>
           </a:xfrm>
-          <a:prstGeom prst="rect">
+          <a:prstGeom prst="roundRect">
             <a:avLst/>
           </a:prstGeom>
           <a:solidFill>
@@ -4905,11 +4980,21 @@
   <p:clrMapOvr>
     <a:masterClrMapping/>
   </p:clrMapOvr>
+  <p:transition spd="med" advClick="1">
+    <mc:AlternateContent>
+      <mc:Choice Requires="p14">
+        <p14:morph/>
+      </mc:Choice>
+      <mc:Fallback>
+        <p:fade/>
+      </mc:Fallback>
+    </mc:AlternateContent>
+  </p:transition>
 </p:sld>
 </file>
 
 <file path=ppt/slides/slide8.xml><?xml version="1.0" encoding="utf-8"?>
-<p:sld xmlns:a="http://schemas.openxmlformats.org/drawingml/2006/main" xmlns:r="http://schemas.openxmlformats.org/officeDocument/2006/relationships" xmlns:p="http://schemas.openxmlformats.org/presentationml/2006/main">
+<p:sld xmlns:a="http://schemas.openxmlformats.org/drawingml/2006/main" xmlns:r="http://schemas.openxmlformats.org/officeDocument/2006/relationships" xmlns:p="http://schemas.openxmlformats.org/presentationml/2006/main" xmlns:mc="http://schemas.openxmlformats.org/markup-compatibility/2006" xmlns:p14="http://schemas.microsoft.com/office/powerpoint/2010/main" mc:Ignorable="p14">
   <p:cSld>
     <p:spTree>
       <p:nvGrpSpPr>
@@ -4998,12 +5083,12 @@
             <a:off x="600000" y="1300000"/>
             <a:ext cx="4600000" cy="4900000"/>
           </a:xfrm>
-          <a:prstGeom prst="rect">
+          <a:prstGeom prst="roundRect">
             <a:avLst/>
           </a:prstGeom>
           <a:ln w="19050">
             <a:solidFill>
-              <a:srgbClr val="CBD5E1"/>
+              <a:srgbClr val="2563EB"/>
             </a:solidFill>
           </a:ln>
         </p:spPr>
@@ -5019,7 +5104,7 @@
             <a:off x="5400000" y="1300000"/>
             <a:ext cx="6192000" cy="4900000"/>
           </a:xfrm>
-          <a:prstGeom prst="rect">
+          <a:prstGeom prst="roundRect">
             <a:avLst/>
           </a:prstGeom>
           <a:solidFill>
@@ -5085,23 +5170,6 @@
               <a:t>• سەرچاوە: Goodfellow, I. (2023). Deep Learning. MIT Press.</a:t>
             </a:r>
           </a:p>
-          <a:p>
-            <a:pPr algn="ctr" rtl="1">
-              <a:spcBef>
-                <a:spcPts val="1200"/>
-              </a:spcBef>
-            </a:pPr>
-            <a:r>
-              <a:rPr lang="ar-IQ" sz="2000" b="1">
-                <a:solidFill>
-                  <a:srgbClr val="2563EB"/>
-                </a:solidFill>
-                <a:latin typeface="Calibri"/>
-                <a:cs typeface="Calibri"/>
-              </a:rPr>
-              <a:t>✨ سوپاس بۆ ئامادەبوونتان ✨</a:t>
-            </a:r>
-          </a:p>
         </p:txBody>
       </p:sp>
       <p:sp>
@@ -5142,6 +5210,16 @@
   <p:clrMapOvr>
     <a:masterClrMapping/>
   </p:clrMapOvr>
+  <p:transition spd="med" advClick="1">
+    <mc:AlternateContent>
+      <mc:Choice Requires="p14">
+        <p14:morph/>
+      </mc:Choice>
+      <mc:Fallback>
+        <p:fade/>
+      </mc:Fallback>
+    </mc:AlternateContent>
+  </p:transition>
 </p:sld>
 </file>
 
